--- a/OSu/Chap06.pptx
+++ b/OSu/Chap06.pptx
@@ -17150,7 +17150,7 @@
               <a:rPr lang="en-US" altLang="en-US" sz="2400" b="1" dirty="0">
                 <a:latin typeface="Courier New" panose="02070309020205020404" pitchFamily="49" charset="0"/>
               </a:rPr>
-              <a:t> flag[2]</a:t>
+              <a:t> flag[2];</a:t>
             </a:r>
           </a:p>
           <a:p>
@@ -22998,11 +22998,11 @@
                   <a:srgbClr val="0000FF"/>
                 </a:solidFill>
               </a:rPr>
-              <a:t>mutex locks, semaphores, monitors</a:t>
+              <a:t>mutex locks, semaphores</a:t>
             </a:r>
             <a:r>
               <a:rPr lang="en-US" altLang="en-US" sz="2800" dirty="0"/>
-              <a:t>, and condition variables can be used to solve the critical section problem</a:t>
+              <a:t>, monitors, and condition variables can be used to solve the critical section problem</a:t>
             </a:r>
           </a:p>
         </p:txBody>
@@ -26659,7 +26659,7 @@
             <a:pPr lvl="1"/>
             <a:r>
               <a:rPr lang="en-US" altLang="en-US" sz="2400" dirty="0"/>
-              <a:t>We illustrated the problem in Chapter 4 when we considered the Bounded Buffer problem with use of a counter that is updated concurrently by the producer and consumer, which leads to race condition</a:t>
+              <a:t>We illustrated the problem in Chap. 4 when we considered the Bounded Buffer problem with use of a counter that is updated concurrently by the producer and consumer, which leads to race condition</a:t>
             </a:r>
           </a:p>
         </p:txBody>
@@ -33864,9 +33864,13 @@
               </a:rPr>
               <a:t>section</a:t>
             </a:r>
+            <a:endParaRPr lang="en-US" altLang="en-US" sz="2400" dirty="0"/>
+          </a:p>
+          <a:p>
+            <a:pPr lvl="1"/>
             <a:r>
               <a:rPr lang="en-US" altLang="en-US" sz="2400" dirty="0"/>
-              <a:t>, may follow critical section with </a:t>
+              <a:t>Critical section may be followed by </a:t>
             </a:r>
             <a:r>
               <a:rPr lang="en-US" altLang="en-US" sz="2400" b="1" dirty="0">
